--- a/public/fun/pack/pptx/newspro/카드뉴스프리미엄_22_건강·안심습관_네온아쿠아.pptx
+++ b/public/fun/pack/pptx/newspro/카드뉴스프리미엄_22_건강·안심습관_네온아쿠아.pptx
@@ -113,12 +113,12 @@
   <p:extLst>
     <p:ext uri="{521415D9-36F7-43E2-AB2F-B90AF26B5E84}">
       <p14:sectionLst xmlns:p14="http://schemas.microsoft.com/office/powerpoint/2010/main">
-        <p14:section name="시작" id="{3F38AC53-C371-44BB-9F61-C95BDCDE469D}">
+        <p14:section name="시작" id="{4D58AB3B-9ADF-4FAE-8281-8406C0274E13}">
           <p14:sldIdLst>
             <p14:sldId id="256"/>
           </p14:sldIdLst>
         </p14:section>
-        <p14:section name="본문" id="{9EB9C68F-4025-44B8-822B-505AD5077B85}">
+        <p14:section name="본문" id="{9EE07489-5414-4838-BDC2-652CC20185D1}">
           <p14:sldIdLst>
             <p14:sldId id="257"/>
             <p14:sldId id="258"/>
@@ -127,7 +127,7 @@
             <p14:sldId id="261"/>
           </p14:sldIdLst>
         </p14:section>
-        <p14:section name="마무리" id="{67211D02-4836-4498-BA4E-29C51EFBE4D6}">
+        <p14:section name="마무리" id="{C4777709-AE75-4BC7-897E-BF84BC9B0143}">
           <p14:sldIdLst>
             <p14:sldId id="262"/>
           </p14:sldIdLst>
@@ -1597,7 +1597,7 @@
             </a:lvl1pPr>
           </a:lstStyle>
           <a:p>
-            <a:fld id="{8339E293-CBBF-4FD7-B39D-A012F51949A9}" type="slidenum">
+            <a:fld id="{E4F60BF4-990D-4C1E-971D-6DA3DF160127}" type="slidenum">
               <a:rPr lang="en-US"/>
               <a:t>‹#›</a:t>
             </a:fld>
@@ -2283,7 +2283,7 @@
             </a:lvl1pPr>
           </a:lstStyle>
           <a:p>
-            <a:fld id="{2DF38461-D5AA-457D-84BC-F1113636D145}" type="slidenum">
+            <a:fld id="{1D8906E9-6635-4838-BD89-F7909C37A882}" type="slidenum">
               <a:rPr lang="en-US"/>
               <a:t>‹#›</a:t>
             </a:fld>
@@ -2912,7 +2912,7 @@
             </a:lvl1pPr>
           </a:lstStyle>
           <a:p>
-            <a:fld id="{1361C5E8-14BE-4D0B-89C0-9FC42037ECF2}" type="slidenum">
+            <a:fld id="{55A3A710-3307-42DA-B1E6-8E438221C67D}" type="slidenum">
               <a:rPr lang="en-US"/>
               <a:t>‹#›</a:t>
             </a:fld>
@@ -3721,7 +3721,7 @@
           <a:p>
             <a:r>
               <a:rPr lang="ko-KR"/>
-              <a:t>더위 먹지 않게 챙길 것 다섯 가지</a:t>
+              <a:t>지치지 않게 챙길 것 다섯 가지</a:t>
             </a:r>
           </a:p>
         </p:txBody>
@@ -3850,7 +3850,7 @@
           <a:bodyPr/>
           <a:lstStyle/>
           <a:p>
-            <a:fld id="{24AD63A1-C8C4-467E-873C-08D31F605BFC}" type="slidenum">
+            <a:fld id="{9F690E1C-18AE-4F96-8F1F-12221FEBBAB6}" type="slidenum">
               <a:rPr lang="en-US"/>
               <a:t>‹#›</a:t>
             </a:fld>
@@ -4016,7 +4016,7 @@
           <a:bodyPr/>
           <a:lstStyle/>
           <a:p>
-            <a:fld id="{C940DD5E-DEB2-4264-BF2A-B0A8AE1D78F2}" type="slidenum">
+            <a:fld id="{2DE61A68-EA5A-484F-8894-7D1BB21D8F26}" type="slidenum">
               <a:rPr lang="en-US"/>
               <a:t>‹#›</a:t>
             </a:fld>
@@ -4182,7 +4182,7 @@
           <a:bodyPr/>
           <a:lstStyle/>
           <a:p>
-            <a:fld id="{D1398D29-E584-46E6-9ABD-868C1458CF57}" type="slidenum">
+            <a:fld id="{078C1259-DD84-4890-873D-01530DEE6211}" type="slidenum">
               <a:rPr lang="en-US"/>
               <a:t>‹#›</a:t>
             </a:fld>
@@ -4348,7 +4348,7 @@
           <a:bodyPr/>
           <a:lstStyle/>
           <a:p>
-            <a:fld id="{DCDA61A5-125D-47EC-8A42-CBF839246FF2}" type="slidenum">
+            <a:fld id="{98F73D7A-1CC3-488F-87C7-B476BAB4966D}" type="slidenum">
               <a:rPr lang="en-US"/>
               <a:t>‹#›</a:t>
             </a:fld>
@@ -4514,7 +4514,7 @@
           <a:bodyPr/>
           <a:lstStyle/>
           <a:p>
-            <a:fld id="{BAF42293-282F-4911-8950-A196F77BE8B3}" type="slidenum">
+            <a:fld id="{B6182B0C-186C-4703-824A-C00FD045C808}" type="slidenum">
               <a:rPr lang="en-US"/>
               <a:t>‹#›</a:t>
             </a:fld>
